--- a/LEC/lec14-15-sql-python/ai-agent-nl2sql.pptx
+++ b/LEC/lec14-15-sql-python/ai-agent-nl2sql.pptx
@@ -146,6 +146,9 @@
     <p:ext uri="{EFAFB233-063F-42B5-8137-9DF3F51BA10A}">
       <p15:sldGuideLst xmlns:p15="http://schemas.microsoft.com/office/powerpoint/2012/main"/>
     </p:ext>
+    <p:ext uri="{2D200454-40CA-4A62-9FC3-DE9A4176ACB9}">
+      <p15:notesGuideLst xmlns:p15="http://schemas.microsoft.com/office/powerpoint/2012/main"/>
+    </p:ext>
   </p:extLst>
 </p:presentation>
 </file>
@@ -153,7 +156,7 @@
 <file path=ppt/revisionInfo.xml><?xml version="1.0" encoding="utf-8"?>
 <p1510:revInfo xmlns:a="http://schemas.openxmlformats.org/drawingml/2006/main" xmlns:r="http://schemas.openxmlformats.org/officeDocument/2006/relationships" xmlns:p1510="http://schemas.microsoft.com/office/powerpoint/2015/10/main">
   <p1510:revLst>
-    <p1510:client id="{0D84F497-C8A4-4AFE-B420-A1C663C7B042}" v="41" dt="2026-10-22T14:23:44.002"/>
+    <p1510:client id="{94E4FCE7-3766-464D-962B-2B8F4E404F86}" v="2" dt="2026-10-29T15:16:51.069"/>
   </p1510:revLst>
 </p1510:revInfo>
 </file>
@@ -163,7 +166,7 @@
   <pc:docChgLst>
     <pc:chgData name="Frommer, Ian Dr. (EDU)" userId="28ca3ff0-544f-450a-928b-99e19cf49b89" providerId="ADAL" clId="{A3E8E5B1-0D91-4643-B70B-3D065C8674E0}"/>
     <pc:docChg chg="undo redo custSel addSld delSld modSld sldOrd">
-      <pc:chgData name="Frommer, Ian Dr. (EDU)" userId="28ca3ff0-544f-450a-928b-99e19cf49b89" providerId="ADAL" clId="{A3E8E5B1-0D91-4643-B70B-3D065C8674E0}" dt="2026-10-22T14:30:15.356" v="528" actId="1035"/>
+      <pc:chgData name="Frommer, Ian Dr. (EDU)" userId="28ca3ff0-544f-450a-928b-99e19cf49b89" providerId="ADAL" clId="{A3E8E5B1-0D91-4643-B70B-3D065C8674E0}" dt="2026-10-29T15:16:51.069" v="532" actId="767"/>
       <pc:docMkLst>
         <pc:docMk/>
       </pc:docMkLst>
@@ -181,14 +184,6 @@
             <ac:spMk id="2" creationId="{92DA5208-0965-8B95-983C-6B93896B5C2B}"/>
           </ac:spMkLst>
         </pc:spChg>
-        <pc:spChg chg="del mod">
-          <ac:chgData name="Frommer, Ian Dr. (EDU)" userId="28ca3ff0-544f-450a-928b-99e19cf49b89" providerId="ADAL" clId="{A3E8E5B1-0D91-4643-B70B-3D065C8674E0}" dt="2026-10-22T13:12:57.208" v="124" actId="478"/>
-          <ac:spMkLst>
-            <pc:docMk/>
-            <pc:sldMk cId="3535299283" sldId="256"/>
-            <ac:spMk id="3" creationId="{65C5927B-DEF2-F70C-1FDE-012955920C21}"/>
-          </ac:spMkLst>
-        </pc:spChg>
         <pc:picChg chg="add mod">
           <ac:chgData name="Frommer, Ian Dr. (EDU)" userId="28ca3ff0-544f-450a-928b-99e19cf49b89" providerId="ADAL" clId="{A3E8E5B1-0D91-4643-B70B-3D065C8674E0}" dt="2026-10-22T14:30:15.356" v="528" actId="1035"/>
           <ac:picMkLst>
@@ -197,34 +192,6 @@
             <ac:picMk id="5" creationId="{83F86CCB-2CDE-4684-B1E1-211F6A3A750E}"/>
           </ac:picMkLst>
         </pc:picChg>
-      </pc:sldChg>
-      <pc:sldChg chg="del">
-        <pc:chgData name="Frommer, Ian Dr. (EDU)" userId="28ca3ff0-544f-450a-928b-99e19cf49b89" providerId="ADAL" clId="{A3E8E5B1-0D91-4643-B70B-3D065C8674E0}" dt="2026-10-22T13:06:54.630" v="14" actId="47"/>
-        <pc:sldMkLst>
-          <pc:docMk/>
-          <pc:sldMk cId="302958083" sldId="257"/>
-        </pc:sldMkLst>
-      </pc:sldChg>
-      <pc:sldChg chg="del">
-        <pc:chgData name="Frommer, Ian Dr. (EDU)" userId="28ca3ff0-544f-450a-928b-99e19cf49b89" providerId="ADAL" clId="{A3E8E5B1-0D91-4643-B70B-3D065C8674E0}" dt="2026-10-22T13:06:56.464" v="16" actId="47"/>
-        <pc:sldMkLst>
-          <pc:docMk/>
-          <pc:sldMk cId="2421586946" sldId="258"/>
-        </pc:sldMkLst>
-      </pc:sldChg>
-      <pc:sldChg chg="del">
-        <pc:chgData name="Frommer, Ian Dr. (EDU)" userId="28ca3ff0-544f-450a-928b-99e19cf49b89" providerId="ADAL" clId="{A3E8E5B1-0D91-4643-B70B-3D065C8674E0}" dt="2026-10-22T13:06:57.010" v="17" actId="47"/>
-        <pc:sldMkLst>
-          <pc:docMk/>
-          <pc:sldMk cId="3967150312" sldId="259"/>
-        </pc:sldMkLst>
-      </pc:sldChg>
-      <pc:sldChg chg="del">
-        <pc:chgData name="Frommer, Ian Dr. (EDU)" userId="28ca3ff0-544f-450a-928b-99e19cf49b89" providerId="ADAL" clId="{A3E8E5B1-0D91-4643-B70B-3D065C8674E0}" dt="2026-10-22T13:06:58.708" v="18" actId="47"/>
-        <pc:sldMkLst>
-          <pc:docMk/>
-          <pc:sldMk cId="3191667989" sldId="261"/>
-        </pc:sldMkLst>
       </pc:sldChg>
       <pc:sldChg chg="modSp mod">
         <pc:chgData name="Frommer, Ian Dr. (EDU)" userId="28ca3ff0-544f-450a-928b-99e19cf49b89" providerId="ADAL" clId="{A3E8E5B1-0D91-4643-B70B-3D065C8674E0}" dt="2026-10-22T13:33:54.360" v="404" actId="20577"/>
@@ -241,23 +208,8 @@
           </ac:spMkLst>
         </pc:spChg>
       </pc:sldChg>
-      <pc:sldChg chg="delSp del mod">
-        <pc:chgData name="Frommer, Ian Dr. (EDU)" userId="28ca3ff0-544f-450a-928b-99e19cf49b89" providerId="ADAL" clId="{A3E8E5B1-0D91-4643-B70B-3D065C8674E0}" dt="2026-10-22T13:09:28.322" v="76" actId="47"/>
-        <pc:sldMkLst>
-          <pc:docMk/>
-          <pc:sldMk cId="1709304841" sldId="263"/>
-        </pc:sldMkLst>
-        <pc:picChg chg="del">
-          <ac:chgData name="Frommer, Ian Dr. (EDU)" userId="28ca3ff0-544f-450a-928b-99e19cf49b89" providerId="ADAL" clId="{A3E8E5B1-0D91-4643-B70B-3D065C8674E0}" dt="2026-10-22T13:09:14.040" v="73" actId="21"/>
-          <ac:picMkLst>
-            <pc:docMk/>
-            <pc:sldMk cId="1709304841" sldId="263"/>
-            <ac:picMk id="7" creationId="{E1ACB30C-5B23-A33B-DA12-0A0702D9DA65}"/>
-          </ac:picMkLst>
-        </pc:picChg>
-      </pc:sldChg>
-      <pc:sldChg chg="modSp mod modAnim">
-        <pc:chgData name="Frommer, Ian Dr. (EDU)" userId="28ca3ff0-544f-450a-928b-99e19cf49b89" providerId="ADAL" clId="{A3E8E5B1-0D91-4643-B70B-3D065C8674E0}" dt="2026-10-22T13:33:40.924" v="400"/>
+      <pc:sldChg chg="addSp modSp mod modAnim">
+        <pc:chgData name="Frommer, Ian Dr. (EDU)" userId="28ca3ff0-544f-450a-928b-99e19cf49b89" providerId="ADAL" clId="{A3E8E5B1-0D91-4643-B70B-3D065C8674E0}" dt="2026-10-29T15:16:51.069" v="532" actId="767"/>
         <pc:sldMkLst>
           <pc:docMk/>
           <pc:sldMk cId="770100716" sldId="264"/>
@@ -271,11 +223,19 @@
           </ac:spMkLst>
         </pc:spChg>
         <pc:spChg chg="mod">
-          <ac:chgData name="Frommer, Ian Dr. (EDU)" userId="28ca3ff0-544f-450a-928b-99e19cf49b89" providerId="ADAL" clId="{A3E8E5B1-0D91-4643-B70B-3D065C8674E0}" dt="2026-10-22T13:33:31.454" v="397"/>
+          <ac:chgData name="Frommer, Ian Dr. (EDU)" userId="28ca3ff0-544f-450a-928b-99e19cf49b89" providerId="ADAL" clId="{A3E8E5B1-0D91-4643-B70B-3D065C8674E0}" dt="2026-10-29T15:16:32.092" v="530" actId="1076"/>
           <ac:spMkLst>
             <pc:docMk/>
             <pc:sldMk cId="770100716" sldId="264"/>
             <ac:spMk id="3" creationId="{4781486B-F490-BC4C-4358-926DA8AE48E2}"/>
+          </ac:spMkLst>
+        </pc:spChg>
+        <pc:spChg chg="add mod">
+          <ac:chgData name="Frommer, Ian Dr. (EDU)" userId="28ca3ff0-544f-450a-928b-99e19cf49b89" providerId="ADAL" clId="{A3E8E5B1-0D91-4643-B70B-3D065C8674E0}" dt="2026-10-29T15:16:51.069" v="532" actId="767"/>
+          <ac:spMkLst>
+            <pc:docMk/>
+            <pc:sldMk cId="770100716" sldId="264"/>
+            <ac:spMk id="4" creationId="{99E47FBB-EC6E-63DE-A018-3680FB91AF34}"/>
           </ac:spMkLst>
         </pc:spChg>
       </pc:sldChg>
@@ -316,20 +276,6 @@
             <ac:spMk id="3" creationId="{015F90DE-7D69-D148-C893-DC96E468CD65}"/>
           </ac:spMkLst>
         </pc:spChg>
-      </pc:sldChg>
-      <pc:sldChg chg="del">
-        <pc:chgData name="Frommer, Ian Dr. (EDU)" userId="28ca3ff0-544f-450a-928b-99e19cf49b89" providerId="ADAL" clId="{A3E8E5B1-0D91-4643-B70B-3D065C8674E0}" dt="2026-10-22T13:06:55.186" v="15" actId="47"/>
-        <pc:sldMkLst>
-          <pc:docMk/>
-          <pc:sldMk cId="2625789182" sldId="267"/>
-        </pc:sldMkLst>
-      </pc:sldChg>
-      <pc:sldChg chg="del">
-        <pc:chgData name="Frommer, Ian Dr. (EDU)" userId="28ca3ff0-544f-450a-928b-99e19cf49b89" providerId="ADAL" clId="{A3E8E5B1-0D91-4643-B70B-3D065C8674E0}" dt="2026-10-22T13:07:04.431" v="19" actId="47"/>
-        <pc:sldMkLst>
-          <pc:docMk/>
-          <pc:sldMk cId="1665743684" sldId="268"/>
-        </pc:sldMkLst>
       </pc:sldChg>
       <pc:sldChg chg="modSp modAnim">
         <pc:chgData name="Frommer, Ian Dr. (EDU)" userId="28ca3ff0-544f-450a-928b-99e19cf49b89" providerId="ADAL" clId="{A3E8E5B1-0D91-4643-B70B-3D065C8674E0}" dt="2026-10-22T13:33:40.924" v="400"/>
@@ -496,28 +442,12 @@
             <ac:spMk id="12" creationId="{FC3754FF-777E-228C-EFED-7D75F21673F9}"/>
           </ac:spMkLst>
         </pc:spChg>
-        <pc:picChg chg="add del mod">
-          <ac:chgData name="Frommer, Ian Dr. (EDU)" userId="28ca3ff0-544f-450a-928b-99e19cf49b89" providerId="ADAL" clId="{A3E8E5B1-0D91-4643-B70B-3D065C8674E0}" dt="2026-10-22T14:06:11.135" v="426" actId="478"/>
-          <ac:picMkLst>
-            <pc:docMk/>
-            <pc:sldMk cId="3707109464" sldId="281"/>
-            <ac:picMk id="6" creationId="{F1984216-4EFF-49C6-AFF2-E38F4CF71B0F}"/>
-          </ac:picMkLst>
-        </pc:picChg>
         <pc:picChg chg="add mod">
           <ac:chgData name="Frommer, Ian Dr. (EDU)" userId="28ca3ff0-544f-450a-928b-99e19cf49b89" providerId="ADAL" clId="{A3E8E5B1-0D91-4643-B70B-3D065C8674E0}" dt="2026-10-22T14:06:21.021" v="430" actId="1440"/>
           <ac:picMkLst>
             <pc:docMk/>
             <pc:sldMk cId="3707109464" sldId="281"/>
             <ac:picMk id="8" creationId="{7FED7A27-9243-322E-AEC3-A24E5C3A1936}"/>
-          </ac:picMkLst>
-        </pc:picChg>
-        <pc:picChg chg="del">
-          <ac:chgData name="Frommer, Ian Dr. (EDU)" userId="28ca3ff0-544f-450a-928b-99e19cf49b89" providerId="ADAL" clId="{A3E8E5B1-0D91-4643-B70B-3D065C8674E0}" dt="2026-10-22T13:58:14.899" v="405" actId="478"/>
-          <ac:picMkLst>
-            <pc:docMk/>
-            <pc:sldMk cId="3707109464" sldId="281"/>
-            <ac:picMk id="11" creationId="{FCDBA5DF-F13A-BBCA-E63C-7F4AF9489D8F}"/>
           </ac:picMkLst>
         </pc:picChg>
       </pc:sldChg>
@@ -671,13 +601,6 @@
           </ac:spMkLst>
         </pc:spChg>
       </pc:sldChg>
-      <pc:sldChg chg="del">
-        <pc:chgData name="Frommer, Ian Dr. (EDU)" userId="28ca3ff0-544f-450a-928b-99e19cf49b89" providerId="ADAL" clId="{A3E8E5B1-0D91-4643-B70B-3D065C8674E0}" dt="2026-10-22T13:11:59.784" v="91" actId="47"/>
-        <pc:sldMkLst>
-          <pc:docMk/>
-          <pc:sldMk cId="1331138628" sldId="295"/>
-        </pc:sldMkLst>
-      </pc:sldChg>
       <pc:sldChg chg="modSp modAnim">
         <pc:chgData name="Frommer, Ian Dr. (EDU)" userId="28ca3ff0-544f-450a-928b-99e19cf49b89" providerId="ADAL" clId="{A3E8E5B1-0D91-4643-B70B-3D065C8674E0}" dt="2026-10-22T13:33:40.924" v="400"/>
         <pc:sldMkLst>
@@ -693,13 +616,6 @@
           </ac:spMkLst>
         </pc:spChg>
       </pc:sldChg>
-      <pc:sldChg chg="del">
-        <pc:chgData name="Frommer, Ian Dr. (EDU)" userId="28ca3ff0-544f-450a-928b-99e19cf49b89" providerId="ADAL" clId="{A3E8E5B1-0D91-4643-B70B-3D065C8674E0}" dt="2026-10-22T13:07:21.291" v="25" actId="47"/>
-        <pc:sldMkLst>
-          <pc:docMk/>
-          <pc:sldMk cId="1879190749" sldId="297"/>
-        </pc:sldMkLst>
-      </pc:sldChg>
       <pc:sldChg chg="modSp modAnim">
         <pc:chgData name="Frommer, Ian Dr. (EDU)" userId="28ca3ff0-544f-450a-928b-99e19cf49b89" providerId="ADAL" clId="{A3E8E5B1-0D91-4643-B70B-3D065C8674E0}" dt="2026-10-22T13:33:40.924" v="400"/>
         <pc:sldMkLst>
@@ -714,20 +630,6 @@
             <ac:spMk id="3" creationId="{FB40710B-E609-0958-7927-8883B3B6A69F}"/>
           </ac:spMkLst>
         </pc:spChg>
-      </pc:sldChg>
-      <pc:sldChg chg="del">
-        <pc:chgData name="Frommer, Ian Dr. (EDU)" userId="28ca3ff0-544f-450a-928b-99e19cf49b89" providerId="ADAL" clId="{A3E8E5B1-0D91-4643-B70B-3D065C8674E0}" dt="2026-10-22T13:07:20.354" v="24" actId="47"/>
-        <pc:sldMkLst>
-          <pc:docMk/>
-          <pc:sldMk cId="4227174038" sldId="299"/>
-        </pc:sldMkLst>
-      </pc:sldChg>
-      <pc:sldChg chg="del">
-        <pc:chgData name="Frommer, Ian Dr. (EDU)" userId="28ca3ff0-544f-450a-928b-99e19cf49b89" providerId="ADAL" clId="{A3E8E5B1-0D91-4643-B70B-3D065C8674E0}" dt="2026-10-22T13:07:17.698" v="20" actId="47"/>
-        <pc:sldMkLst>
-          <pc:docMk/>
-          <pc:sldMk cId="2898334890" sldId="301"/>
-        </pc:sldMkLst>
       </pc:sldChg>
       <pc:sldChg chg="modSp new mod">
         <pc:chgData name="Frommer, Ian Dr. (EDU)" userId="28ca3ff0-544f-450a-928b-99e19cf49b89" providerId="ADAL" clId="{A3E8E5B1-0D91-4643-B70B-3D065C8674E0}" dt="2026-10-22T14:23:44.017" v="467" actId="27636"/>
@@ -774,28 +676,6 @@
             <ac:spMk id="3" creationId="{4CCB0AB9-ECD2-FC3C-0D89-BBB0B5E78791}"/>
           </ac:spMkLst>
         </pc:spChg>
-        <pc:spChg chg="add del">
-          <ac:chgData name="Frommer, Ian Dr. (EDU)" userId="28ca3ff0-544f-450a-928b-99e19cf49b89" providerId="ADAL" clId="{A3E8E5B1-0D91-4643-B70B-3D065C8674E0}" dt="2026-10-22T13:14:40.718" v="138" actId="22"/>
-          <ac:spMkLst>
-            <pc:docMk/>
-            <pc:sldMk cId="2270651041" sldId="302"/>
-            <ac:spMk id="5" creationId="{259ED4D0-3BC3-2FC8-1FC0-6D099F3551E5}"/>
-          </ac:spMkLst>
-        </pc:spChg>
-      </pc:sldChg>
-      <pc:sldChg chg="del">
-        <pc:chgData name="Frommer, Ian Dr. (EDU)" userId="28ca3ff0-544f-450a-928b-99e19cf49b89" providerId="ADAL" clId="{A3E8E5B1-0D91-4643-B70B-3D065C8674E0}" dt="2026-10-22T13:07:18.144" v="21" actId="47"/>
-        <pc:sldMkLst>
-          <pc:docMk/>
-          <pc:sldMk cId="2979442443" sldId="302"/>
-        </pc:sldMkLst>
-      </pc:sldChg>
-      <pc:sldChg chg="del">
-        <pc:chgData name="Frommer, Ian Dr. (EDU)" userId="28ca3ff0-544f-450a-928b-99e19cf49b89" providerId="ADAL" clId="{A3E8E5B1-0D91-4643-B70B-3D065C8674E0}" dt="2026-10-22T13:07:18.640" v="22" actId="47"/>
-        <pc:sldMkLst>
-          <pc:docMk/>
-          <pc:sldMk cId="2549573186" sldId="303"/>
-        </pc:sldMkLst>
       </pc:sldChg>
       <pc:sldChg chg="modSp new mod">
         <pc:chgData name="Frommer, Ian Dr. (EDU)" userId="28ca3ff0-544f-450a-928b-99e19cf49b89" providerId="ADAL" clId="{A3E8E5B1-0D91-4643-B70B-3D065C8674E0}" dt="2026-10-22T13:33:31.454" v="397"/>
@@ -843,13 +723,6 @@
           </ac:spMkLst>
         </pc:spChg>
       </pc:sldChg>
-      <pc:sldChg chg="del">
-        <pc:chgData name="Frommer, Ian Dr. (EDU)" userId="28ca3ff0-544f-450a-928b-99e19cf49b89" providerId="ADAL" clId="{A3E8E5B1-0D91-4643-B70B-3D065C8674E0}" dt="2026-10-22T13:07:19.330" v="23" actId="47"/>
-        <pc:sldMkLst>
-          <pc:docMk/>
-          <pc:sldMk cId="2317873800" sldId="304"/>
-        </pc:sldMkLst>
-      </pc:sldChg>
       <pc:sldChg chg="modSp new mod ord">
         <pc:chgData name="Frommer, Ian Dr. (EDU)" userId="28ca3ff0-544f-450a-928b-99e19cf49b89" providerId="ADAL" clId="{A3E8E5B1-0D91-4643-B70B-3D065C8674E0}" dt="2026-10-22T13:27:21.691" v="367" actId="27636"/>
         <pc:sldMkLst>
@@ -872,13 +745,6 @@
             <ac:spMk id="3" creationId="{551D55B6-81F1-5E7B-0CF7-DF74AA91C26C}"/>
           </ac:spMkLst>
         </pc:spChg>
-      </pc:sldChg>
-      <pc:sldChg chg="del">
-        <pc:chgData name="Frommer, Ian Dr. (EDU)" userId="28ca3ff0-544f-450a-928b-99e19cf49b89" providerId="ADAL" clId="{A3E8E5B1-0D91-4643-B70B-3D065C8674E0}" dt="2026-10-22T13:07:22.590" v="26" actId="47"/>
-        <pc:sldMkLst>
-          <pc:docMk/>
-          <pc:sldMk cId="2040294858" sldId="305"/>
-        </pc:sldMkLst>
       </pc:sldChg>
       <pc:sldChg chg="addSp modSp new mod">
         <pc:chgData name="Frommer, Ian Dr. (EDU)" userId="28ca3ff0-544f-450a-928b-99e19cf49b89" providerId="ADAL" clId="{A3E8E5B1-0D91-4643-B70B-3D065C8674E0}" dt="2026-10-22T14:29:24.947" v="526" actId="1076"/>
@@ -1006,7 +872,7 @@
           <a:p>
             <a:fld id="{02296FF9-73D5-479D-A801-E1416CBB8EE2}" type="datetimeFigureOut">
               <a:rPr lang="en-US" smtClean="0"/>
-              <a:t>10/22/2026</a:t>
+              <a:t>10/29/2026</a:t>
             </a:fld>
             <a:endParaRPr lang="en-US"/>
           </a:p>
@@ -1536,6 +1402,90 @@
           <a:bodyPr/>
           <a:lstStyle/>
           <a:p>
+            <a:endParaRPr lang="en-US" dirty="0"/>
+          </a:p>
+        </p:txBody>
+      </p:sp>
+      <p:sp>
+        <p:nvSpPr>
+          <p:cNvPr id="4" name="Slide Number Placeholder 3"/>
+          <p:cNvSpPr>
+            <a:spLocks noGrp="1"/>
+          </p:cNvSpPr>
+          <p:nvPr>
+            <p:ph type="sldNum" sz="quarter" idx="5"/>
+          </p:nvPr>
+        </p:nvSpPr>
+        <p:spPr/>
+        <p:txBody>
+          <a:bodyPr/>
+          <a:lstStyle/>
+          <a:p>
+            <a:fld id="{F6D247AF-9427-4C6B-B0BD-033BCEC393AD}" type="slidenum">
+              <a:rPr lang="en-US" smtClean="0"/>
+              <a:t>4</a:t>
+            </a:fld>
+            <a:endParaRPr lang="en-US"/>
+          </a:p>
+        </p:txBody>
+      </p:sp>
+    </p:spTree>
+    <p:extLst>
+      <p:ext uri="{BB962C8B-B14F-4D97-AF65-F5344CB8AC3E}">
+        <p14:creationId xmlns:p14="http://schemas.microsoft.com/office/powerpoint/2010/main" val="610647538"/>
+      </p:ext>
+    </p:extLst>
+  </p:cSld>
+  <p:clrMapOvr>
+    <a:masterClrMapping/>
+  </p:clrMapOvr>
+</p:notes>
+</file>
+
+<file path=ppt/notesSlides/notesSlide3.xml><?xml version="1.0" encoding="utf-8"?>
+<p:notes xmlns:a="http://schemas.openxmlformats.org/drawingml/2006/main" xmlns:r="http://schemas.openxmlformats.org/officeDocument/2006/relationships" xmlns:p="http://schemas.openxmlformats.org/presentationml/2006/main">
+  <p:cSld>
+    <p:spTree>
+      <p:nvGrpSpPr>
+        <p:cNvPr id="1" name=""/>
+        <p:cNvGrpSpPr/>
+        <p:nvPr/>
+      </p:nvGrpSpPr>
+      <p:grpSpPr>
+        <a:xfrm>
+          <a:off x="0" y="0"/>
+          <a:ext cx="0" cy="0"/>
+          <a:chOff x="0" y="0"/>
+          <a:chExt cx="0" cy="0"/>
+        </a:xfrm>
+      </p:grpSpPr>
+      <p:sp>
+        <p:nvSpPr>
+          <p:cNvPr id="2" name="Slide Image Placeholder 1"/>
+          <p:cNvSpPr>
+            <a:spLocks noGrp="1" noRot="1" noChangeAspect="1"/>
+          </p:cNvSpPr>
+          <p:nvPr>
+            <p:ph type="sldImg"/>
+          </p:nvPr>
+        </p:nvSpPr>
+        <p:spPr/>
+      </p:sp>
+      <p:sp>
+        <p:nvSpPr>
+          <p:cNvPr id="3" name="Notes Placeholder 2"/>
+          <p:cNvSpPr>
+            <a:spLocks noGrp="1"/>
+          </p:cNvSpPr>
+          <p:nvPr>
+            <p:ph type="body" idx="1"/>
+          </p:nvPr>
+        </p:nvSpPr>
+        <p:spPr/>
+        <p:txBody>
+          <a:bodyPr/>
+          <a:lstStyle/>
+          <a:p>
             <a:pPr marL="0" marR="0" lvl="0" indent="0" algn="l" defTabSz="914400" rtl="0" eaLnBrk="1" fontAlgn="auto" latinLnBrk="0" hangingPunct="1">
               <a:lnSpc>
                 <a:spcPct val="100000"/>
@@ -1652,7 +1602,7 @@
 </p:notes>
 </file>
 
-<file path=ppt/notesSlides/notesSlide3.xml><?xml version="1.0" encoding="utf-8"?>
+<file path=ppt/notesSlides/notesSlide4.xml><?xml version="1.0" encoding="utf-8"?>
 <p:notes xmlns:a="http://schemas.openxmlformats.org/drawingml/2006/main" xmlns:r="http://schemas.openxmlformats.org/officeDocument/2006/relationships" xmlns:p="http://schemas.openxmlformats.org/presentationml/2006/main">
   <p:cSld>
     <p:spTree>
@@ -1873,90 +1823,6 @@
 </p:notes>
 </file>
 
-<file path=ppt/notesSlides/notesSlide4.xml><?xml version="1.0" encoding="utf-8"?>
-<p:notes xmlns:a="http://schemas.openxmlformats.org/drawingml/2006/main" xmlns:r="http://schemas.openxmlformats.org/officeDocument/2006/relationships" xmlns:p="http://schemas.openxmlformats.org/presentationml/2006/main">
-  <p:cSld>
-    <p:spTree>
-      <p:nvGrpSpPr>
-        <p:cNvPr id="1" name=""/>
-        <p:cNvGrpSpPr/>
-        <p:nvPr/>
-      </p:nvGrpSpPr>
-      <p:grpSpPr>
-        <a:xfrm>
-          <a:off x="0" y="0"/>
-          <a:ext cx="0" cy="0"/>
-          <a:chOff x="0" y="0"/>
-          <a:chExt cx="0" cy="0"/>
-        </a:xfrm>
-      </p:grpSpPr>
-      <p:sp>
-        <p:nvSpPr>
-          <p:cNvPr id="2" name="Slide Image Placeholder 1"/>
-          <p:cNvSpPr>
-            <a:spLocks noGrp="1" noRot="1" noChangeAspect="1"/>
-          </p:cNvSpPr>
-          <p:nvPr>
-            <p:ph type="sldImg"/>
-          </p:nvPr>
-        </p:nvSpPr>
-        <p:spPr/>
-      </p:sp>
-      <p:sp>
-        <p:nvSpPr>
-          <p:cNvPr id="3" name="Notes Placeholder 2"/>
-          <p:cNvSpPr>
-            <a:spLocks noGrp="1"/>
-          </p:cNvSpPr>
-          <p:nvPr>
-            <p:ph type="body" idx="1"/>
-          </p:nvPr>
-        </p:nvSpPr>
-        <p:spPr/>
-        <p:txBody>
-          <a:bodyPr/>
-          <a:lstStyle/>
-          <a:p>
-            <a:endParaRPr lang="en-US" dirty="0"/>
-          </a:p>
-        </p:txBody>
-      </p:sp>
-      <p:sp>
-        <p:nvSpPr>
-          <p:cNvPr id="4" name="Slide Number Placeholder 3"/>
-          <p:cNvSpPr>
-            <a:spLocks noGrp="1"/>
-          </p:cNvSpPr>
-          <p:nvPr>
-            <p:ph type="sldNum" sz="quarter" idx="5"/>
-          </p:nvPr>
-        </p:nvSpPr>
-        <p:spPr/>
-        <p:txBody>
-          <a:bodyPr/>
-          <a:lstStyle/>
-          <a:p>
-            <a:fld id="{F6D247AF-9427-4C6B-B0BD-033BCEC393AD}" type="slidenum">
-              <a:rPr lang="en-US" smtClean="0"/>
-              <a:t>20</a:t>
-            </a:fld>
-            <a:endParaRPr lang="en-US"/>
-          </a:p>
-        </p:txBody>
-      </p:sp>
-    </p:spTree>
-    <p:extLst>
-      <p:ext uri="{BB962C8B-B14F-4D97-AF65-F5344CB8AC3E}">
-        <p14:creationId xmlns:p14="http://schemas.microsoft.com/office/powerpoint/2010/main" val="3804250037"/>
-      </p:ext>
-    </p:extLst>
-  </p:cSld>
-  <p:clrMapOvr>
-    <a:masterClrMapping/>
-  </p:clrMapOvr>
-</p:notes>
-</file>
-
 <file path=ppt/notesSlides/notesSlide5.xml><?xml version="1.0" encoding="utf-8"?>
 <p:notes xmlns:a="http://schemas.openxmlformats.org/drawingml/2006/main" xmlns:r="http://schemas.openxmlformats.org/officeDocument/2006/relationships" xmlns:p="http://schemas.openxmlformats.org/presentationml/2006/main">
   <p:cSld>
@@ -2022,6 +1888,90 @@
           <a:p>
             <a:fld id="{F6D247AF-9427-4C6B-B0BD-033BCEC393AD}" type="slidenum">
               <a:rPr lang="en-US" smtClean="0"/>
+              <a:t>20</a:t>
+            </a:fld>
+            <a:endParaRPr lang="en-US"/>
+          </a:p>
+        </p:txBody>
+      </p:sp>
+    </p:spTree>
+    <p:extLst>
+      <p:ext uri="{BB962C8B-B14F-4D97-AF65-F5344CB8AC3E}">
+        <p14:creationId xmlns:p14="http://schemas.microsoft.com/office/powerpoint/2010/main" val="3804250037"/>
+      </p:ext>
+    </p:extLst>
+  </p:cSld>
+  <p:clrMapOvr>
+    <a:masterClrMapping/>
+  </p:clrMapOvr>
+</p:notes>
+</file>
+
+<file path=ppt/notesSlides/notesSlide6.xml><?xml version="1.0" encoding="utf-8"?>
+<p:notes xmlns:a="http://schemas.openxmlformats.org/drawingml/2006/main" xmlns:r="http://schemas.openxmlformats.org/officeDocument/2006/relationships" xmlns:p="http://schemas.openxmlformats.org/presentationml/2006/main">
+  <p:cSld>
+    <p:spTree>
+      <p:nvGrpSpPr>
+        <p:cNvPr id="1" name=""/>
+        <p:cNvGrpSpPr/>
+        <p:nvPr/>
+      </p:nvGrpSpPr>
+      <p:grpSpPr>
+        <a:xfrm>
+          <a:off x="0" y="0"/>
+          <a:ext cx="0" cy="0"/>
+          <a:chOff x="0" y="0"/>
+          <a:chExt cx="0" cy="0"/>
+        </a:xfrm>
+      </p:grpSpPr>
+      <p:sp>
+        <p:nvSpPr>
+          <p:cNvPr id="2" name="Slide Image Placeholder 1"/>
+          <p:cNvSpPr>
+            <a:spLocks noGrp="1" noRot="1" noChangeAspect="1"/>
+          </p:cNvSpPr>
+          <p:nvPr>
+            <p:ph type="sldImg"/>
+          </p:nvPr>
+        </p:nvSpPr>
+        <p:spPr/>
+      </p:sp>
+      <p:sp>
+        <p:nvSpPr>
+          <p:cNvPr id="3" name="Notes Placeholder 2"/>
+          <p:cNvSpPr>
+            <a:spLocks noGrp="1"/>
+          </p:cNvSpPr>
+          <p:nvPr>
+            <p:ph type="body" idx="1"/>
+          </p:nvPr>
+        </p:nvSpPr>
+        <p:spPr/>
+        <p:txBody>
+          <a:bodyPr/>
+          <a:lstStyle/>
+          <a:p>
+            <a:endParaRPr lang="en-US" dirty="0"/>
+          </a:p>
+        </p:txBody>
+      </p:sp>
+      <p:sp>
+        <p:nvSpPr>
+          <p:cNvPr id="4" name="Slide Number Placeholder 3"/>
+          <p:cNvSpPr>
+            <a:spLocks noGrp="1"/>
+          </p:cNvSpPr>
+          <p:nvPr>
+            <p:ph type="sldNum" sz="quarter" idx="5"/>
+          </p:nvPr>
+        </p:nvSpPr>
+        <p:spPr/>
+        <p:txBody>
+          <a:bodyPr/>
+          <a:lstStyle/>
+          <a:p>
+            <a:fld id="{F6D247AF-9427-4C6B-B0BD-033BCEC393AD}" type="slidenum">
+              <a:rPr lang="en-US" smtClean="0"/>
               <a:t>26</a:t>
             </a:fld>
             <a:endParaRPr lang="en-US"/>
@@ -2041,7 +1991,7 @@
 </p:notes>
 </file>
 
-<file path=ppt/notesSlides/notesSlide6.xml><?xml version="1.0" encoding="utf-8"?>
+<file path=ppt/notesSlides/notesSlide7.xml><?xml version="1.0" encoding="utf-8"?>
 <p:notes xmlns:a="http://schemas.openxmlformats.org/drawingml/2006/main" xmlns:r="http://schemas.openxmlformats.org/officeDocument/2006/relationships" xmlns:p="http://schemas.openxmlformats.org/presentationml/2006/main">
   <p:cSld>
     <p:spTree>
@@ -2272,7 +2222,7 @@
           <a:p>
             <a:fld id="{27F13BD6-FF64-41A8-A670-415ADC7DA4DA}" type="datetimeFigureOut">
               <a:rPr lang="en-US" smtClean="0"/>
-              <a:t>10/22/2026</a:t>
+              <a:t>10/29/2026</a:t>
             </a:fld>
             <a:endParaRPr lang="en-US"/>
           </a:p>
@@ -2470,7 +2420,7 @@
           <a:p>
             <a:fld id="{27F13BD6-FF64-41A8-A670-415ADC7DA4DA}" type="datetimeFigureOut">
               <a:rPr lang="en-US" smtClean="0"/>
-              <a:t>10/22/2026</a:t>
+              <a:t>10/29/2026</a:t>
             </a:fld>
             <a:endParaRPr lang="en-US"/>
           </a:p>
@@ -2678,7 +2628,7 @@
           <a:p>
             <a:fld id="{27F13BD6-FF64-41A8-A670-415ADC7DA4DA}" type="datetimeFigureOut">
               <a:rPr lang="en-US" smtClean="0"/>
-              <a:t>10/22/2026</a:t>
+              <a:t>10/29/2026</a:t>
             </a:fld>
             <a:endParaRPr lang="en-US"/>
           </a:p>
@@ -2876,7 +2826,7 @@
           <a:p>
             <a:fld id="{27F13BD6-FF64-41A8-A670-415ADC7DA4DA}" type="datetimeFigureOut">
               <a:rPr lang="en-US" smtClean="0"/>
-              <a:t>10/22/2026</a:t>
+              <a:t>10/29/2026</a:t>
             </a:fld>
             <a:endParaRPr lang="en-US"/>
           </a:p>
@@ -3151,7 +3101,7 @@
           <a:p>
             <a:fld id="{27F13BD6-FF64-41A8-A670-415ADC7DA4DA}" type="datetimeFigureOut">
               <a:rPr lang="en-US" smtClean="0"/>
-              <a:t>10/22/2026</a:t>
+              <a:t>10/29/2026</a:t>
             </a:fld>
             <a:endParaRPr lang="en-US"/>
           </a:p>
@@ -3416,7 +3366,7 @@
           <a:p>
             <a:fld id="{27F13BD6-FF64-41A8-A670-415ADC7DA4DA}" type="datetimeFigureOut">
               <a:rPr lang="en-US" smtClean="0"/>
-              <a:t>10/22/2026</a:t>
+              <a:t>10/29/2026</a:t>
             </a:fld>
             <a:endParaRPr lang="en-US"/>
           </a:p>
@@ -3828,7 +3778,7 @@
           <a:p>
             <a:fld id="{27F13BD6-FF64-41A8-A670-415ADC7DA4DA}" type="datetimeFigureOut">
               <a:rPr lang="en-US" smtClean="0"/>
-              <a:t>10/22/2026</a:t>
+              <a:t>10/29/2026</a:t>
             </a:fld>
             <a:endParaRPr lang="en-US"/>
           </a:p>
@@ -3969,7 +3919,7 @@
           <a:p>
             <a:fld id="{27F13BD6-FF64-41A8-A670-415ADC7DA4DA}" type="datetimeFigureOut">
               <a:rPr lang="en-US" smtClean="0"/>
-              <a:t>10/22/2026</a:t>
+              <a:t>10/29/2026</a:t>
             </a:fld>
             <a:endParaRPr lang="en-US"/>
           </a:p>
@@ -4082,7 +4032,7 @@
           <a:p>
             <a:fld id="{27F13BD6-FF64-41A8-A670-415ADC7DA4DA}" type="datetimeFigureOut">
               <a:rPr lang="en-US" smtClean="0"/>
-              <a:t>10/22/2026</a:t>
+              <a:t>10/29/2026</a:t>
             </a:fld>
             <a:endParaRPr lang="en-US"/>
           </a:p>
@@ -4393,7 +4343,7 @@
           <a:p>
             <a:fld id="{27F13BD6-FF64-41A8-A670-415ADC7DA4DA}" type="datetimeFigureOut">
               <a:rPr lang="en-US" smtClean="0"/>
-              <a:t>10/22/2026</a:t>
+              <a:t>10/29/2026</a:t>
             </a:fld>
             <a:endParaRPr lang="en-US"/>
           </a:p>
@@ -4681,7 +4631,7 @@
           <a:p>
             <a:fld id="{27F13BD6-FF64-41A8-A670-415ADC7DA4DA}" type="datetimeFigureOut">
               <a:rPr lang="en-US" smtClean="0"/>
-              <a:t>10/22/2026</a:t>
+              <a:t>10/29/2026</a:t>
             </a:fld>
             <a:endParaRPr lang="en-US"/>
           </a:p>
@@ -4922,7 +4872,7 @@
           <a:p>
             <a:fld id="{27F13BD6-FF64-41A8-A670-415ADC7DA4DA}" type="datetimeFigureOut">
               <a:rPr lang="en-US" smtClean="0"/>
-              <a:t>10/22/2026</a:t>
+              <a:t>10/29/2026</a:t>
             </a:fld>
             <a:endParaRPr lang="en-US"/>
           </a:p>
@@ -20050,7 +20000,7 @@
           <p:nvPr/>
         </p:nvPicPr>
         <p:blipFill>
-          <a:blip r:embed="rId2"/>
+          <a:blip r:embed="rId3"/>
           <a:stretch>
             <a:fillRect/>
           </a:stretch>
@@ -20090,7 +20040,7 @@
           <p:nvPr/>
         </p:nvPicPr>
         <p:blipFill>
-          <a:blip r:embed="rId3"/>
+          <a:blip r:embed="rId4"/>
           <a:stretch>
             <a:fillRect/>
           </a:stretch>
@@ -20120,7 +20070,7 @@
           <p:nvPr/>
         </p:nvPicPr>
         <p:blipFill>
-          <a:blip r:embed="rId4"/>
+          <a:blip r:embed="rId5"/>
           <a:srcRect l="5519" t="16002" r="3909" b="15826"/>
           <a:stretch>
             <a:fillRect/>
